--- a/Song Template 2.pptx
+++ b/Song Template 2.pptx
@@ -3570,13 +3570,17 @@
             </a:pPr>
             <a:r>
               <a:rPr lang="en-US" dirty="0">
-                <a:latin typeface="Arial Regular" panose="020B0704020202020204" charset="0"/>
-                <a:cs typeface="Arial Regular" panose="020B0704020202020204" charset="0"/>
+                <a:latin typeface="Courier New Regular" panose="02070609020205020404" charset="0"/>
+                <a:cs typeface="Courier New Regular" panose="02070609020205020404" charset="0"/>
                 <a:sym typeface="+mn-ea"/>
               </a:rPr>
               <a:t>[LYRICS AND CHORDS]</a:t>
             </a:r>
-            <a:endParaRPr lang="en-US" dirty="0"/>
+            <a:endParaRPr lang="en-US" dirty="0">
+              <a:latin typeface="Courier New Regular" panose="02070609020205020404" charset="0"/>
+              <a:cs typeface="Courier New Regular" panose="02070609020205020404" charset="0"/>
+              <a:sym typeface="+mn-ea"/>
+            </a:endParaRPr>
           </a:p>
         </p:txBody>
       </p:sp>
@@ -3602,14 +3606,14 @@
           <a:p>
             <a:r>
               <a:rPr lang="en-US" sz="2400" dirty="0">
-                <a:latin typeface="Arial Regular" panose="020B0704020202020204" charset="0"/>
-                <a:cs typeface="Arial Regular" panose="020B0704020202020204" charset="0"/>
+                <a:latin typeface="Courier New Regular" panose="02070609020205020404" charset="0"/>
+                <a:cs typeface="Courier New Regular" panose="02070609020205020404" charset="0"/>
               </a:rPr>
               <a:t>[Title]</a:t>
             </a:r>
             <a:endParaRPr lang="en-US" sz="2400" dirty="0">
-              <a:latin typeface="Arial Regular" panose="020B0704020202020204" charset="0"/>
-              <a:cs typeface="Arial Regular" panose="020B0704020202020204" charset="0"/>
+              <a:latin typeface="Courier New Regular" panose="02070609020205020404" charset="0"/>
+              <a:cs typeface="Courier New Regular" panose="02070609020205020404" charset="0"/>
             </a:endParaRPr>
           </a:p>
         </p:txBody>
@@ -3636,10 +3640,16 @@
           <a:p>
             <a:pPr algn="l"/>
             <a:r>
-              <a:rPr lang="en-US" dirty="0"/>
+              <a:rPr lang="en-US" dirty="0">
+                <a:latin typeface="Courier New Regular" panose="02070609020205020404" charset="0"/>
+                <a:cs typeface="Courier New Regular" panose="02070609020205020404" charset="0"/>
+              </a:rPr>
               <a:t>[Copyright Info]</a:t>
             </a:r>
-            <a:endParaRPr lang="en-US" dirty="0"/>
+            <a:endParaRPr lang="en-US" dirty="0">
+              <a:latin typeface="Courier New Regular" panose="02070609020205020404" charset="0"/>
+              <a:cs typeface="Courier New Regular" panose="02070609020205020404" charset="0"/>
+            </a:endParaRPr>
           </a:p>
         </p:txBody>
       </p:sp>

--- a/Song Template 2.pptx
+++ b/Song Template 2.pptx
@@ -3570,15 +3570,15 @@
             </a:pPr>
             <a:r>
               <a:rPr lang="en-US" dirty="0">
-                <a:latin typeface="Courier New Regular" panose="02070609020205020404" charset="0"/>
-                <a:cs typeface="Courier New Regular" panose="02070609020205020404" charset="0"/>
+                <a:latin typeface="Times New Roman Regular" panose="02020603050405020304" charset="0"/>
+                <a:cs typeface="Times New Roman Regular" panose="02020603050405020304" charset="0"/>
                 <a:sym typeface="+mn-ea"/>
               </a:rPr>
               <a:t>[LYRICS AND CHORDS]</a:t>
             </a:r>
             <a:endParaRPr lang="en-US" dirty="0">
-              <a:latin typeface="Courier New Regular" panose="02070609020205020404" charset="0"/>
-              <a:cs typeface="Courier New Regular" panose="02070609020205020404" charset="0"/>
+              <a:latin typeface="Times New Roman Regular" panose="02020603050405020304" charset="0"/>
+              <a:cs typeface="Times New Roman Regular" panose="02020603050405020304" charset="0"/>
               <a:sym typeface="+mn-ea"/>
             </a:endParaRPr>
           </a:p>
@@ -3606,14 +3606,14 @@
           <a:p>
             <a:r>
               <a:rPr lang="en-US" sz="2400" dirty="0">
-                <a:latin typeface="Courier New Regular" panose="02070609020205020404" charset="0"/>
-                <a:cs typeface="Courier New Regular" panose="02070609020205020404" charset="0"/>
+                <a:latin typeface="Times New Roman Regular" panose="02020603050405020304" charset="0"/>
+                <a:cs typeface="Times New Roman Regular" panose="02020603050405020304" charset="0"/>
               </a:rPr>
               <a:t>[Title]</a:t>
             </a:r>
             <a:endParaRPr lang="en-US" sz="2400" dirty="0">
-              <a:latin typeface="Courier New Regular" panose="02070609020205020404" charset="0"/>
-              <a:cs typeface="Courier New Regular" panose="02070609020205020404" charset="0"/>
+              <a:latin typeface="Times New Roman Regular" panose="02020603050405020304" charset="0"/>
+              <a:cs typeface="Times New Roman Regular" panose="02020603050405020304" charset="0"/>
             </a:endParaRPr>
           </a:p>
         </p:txBody>
@@ -3641,14 +3641,14 @@
             <a:pPr algn="l"/>
             <a:r>
               <a:rPr lang="en-US" dirty="0">
-                <a:latin typeface="Courier New Regular" panose="02070609020205020404" charset="0"/>
-                <a:cs typeface="Courier New Regular" panose="02070609020205020404" charset="0"/>
+                <a:latin typeface="Times New Roman Regular" panose="02020603050405020304" charset="0"/>
+                <a:cs typeface="Times New Roman Regular" panose="02020603050405020304" charset="0"/>
               </a:rPr>
               <a:t>[Copyright Info]</a:t>
             </a:r>
             <a:endParaRPr lang="en-US" dirty="0">
-              <a:latin typeface="Courier New Regular" panose="02070609020205020404" charset="0"/>
-              <a:cs typeface="Courier New Regular" panose="02070609020205020404" charset="0"/>
+              <a:latin typeface="Times New Roman Regular" panose="02020603050405020304" charset="0"/>
+              <a:cs typeface="Times New Roman Regular" panose="02020603050405020304" charset="0"/>
             </a:endParaRPr>
           </a:p>
         </p:txBody>

--- a/Song Template 2.pptx
+++ b/Song Template 2.pptx
@@ -471,6 +471,58 @@
     </a:lvl9pPr>
   </p:notesStyle>
 </p:notesMaster>
+</file>
+
+<file path=ppt/notesSlides/notesSlide1.xml><?xml version="1.0" encoding="utf-8"?>
+<p:notes xmlns:a="http://schemas.openxmlformats.org/drawingml/2006/main" xmlns:r="http://schemas.openxmlformats.org/officeDocument/2006/relationships" xmlns:p="http://schemas.openxmlformats.org/presentationml/2006/main">
+  <p:cSld>
+    <p:spTree>
+      <p:nvGrpSpPr>
+        <p:cNvPr id="1" name=""/>
+        <p:cNvGrpSpPr/>
+        <p:nvPr/>
+      </p:nvGrpSpPr>
+      <p:grpSpPr/>
+      <p:sp>
+        <p:nvSpPr>
+          <p:cNvPr id="2" name="Slide Image Placeholder 1"/>
+          <p:cNvSpPr>
+            <a:spLocks noGrp="1"/>
+          </p:cNvSpPr>
+          <p:nvPr>
+            <p:ph type="sldImg" idx="2"/>
+          </p:nvPr>
+        </p:nvSpPr>
+        <p:spPr/>
+      </p:sp>
+      <p:sp>
+        <p:nvSpPr>
+          <p:cNvPr id="3" name="Text Placeholder 2"/>
+          <p:cNvSpPr>
+            <a:spLocks noGrp="1"/>
+          </p:cNvSpPr>
+          <p:nvPr>
+            <p:ph type="body" idx="3"/>
+          </p:nvPr>
+        </p:nvSpPr>
+        <p:spPr/>
+        <p:txBody>
+          <a:bodyPr/>
+          <a:p>
+            <a:r>
+              <a:rPr lang="en-US"/>
+              <a:t>[Presenter Note]</a:t>
+            </a:r>
+            <a:endParaRPr lang="en-US"/>
+          </a:p>
+        </p:txBody>
+      </p:sp>
+    </p:spTree>
+  </p:cSld>
+  <p:clrMapOvr>
+    <a:masterClrMapping/>
+  </p:clrMapOvr>
+</p:notes>
 </file>
 
 <file path=ppt/slideLayouts/slideLayout1.xml><?xml version="1.0" encoding="utf-8"?>

--- a/Song Template 2.pptx
+++ b/Song Template 2.pptx
@@ -5,10 +5,10 @@
     <p:sldMasterId id="2147483648" r:id="rId1"/>
   </p:sldMasterIdLst>
   <p:notesMasterIdLst>
-    <p:notesMasterId r:id="rId4"/>
+    <p:notesMasterId r:id="rId3"/>
   </p:notesMasterIdLst>
   <p:sldIdLst>
-    <p:sldId id="5001" r:id="rId3"/>
+    <p:sldId id="5001" r:id="rId2"/>
   </p:sldIdLst>
   <p:sldSz cx="12192000" cy="6858000"/>
   <p:notesSz cx="6858000" cy="9144000"/>
@@ -208,6 +208,7 @@
           <a:p>
             <a:fld id="{3EFD42F7-718C-4B98-AAEC-167E6DDD60A7}" type="datetimeFigureOut">
               <a:rPr lang="en-US" smtClean="0"/>
+              <a:t>4/22/26</a:t>
             </a:fld>
             <a:endParaRPr lang="en-US"/>
           </a:p>
@@ -274,7 +275,6 @@
               <a:rPr lang="en-US"/>
               <a:t>Click to edit Master text styles</a:t>
             </a:r>
-            <a:endParaRPr lang="en-US"/>
           </a:p>
           <a:p>
             <a:pPr lvl="1"/>
@@ -282,7 +282,6 @@
               <a:rPr lang="en-US"/>
               <a:t>Second level</a:t>
             </a:r>
-            <a:endParaRPr lang="en-US"/>
           </a:p>
           <a:p>
             <a:pPr lvl="2"/>
@@ -290,7 +289,6 @@
               <a:rPr lang="en-US"/>
               <a:t>Third level</a:t>
             </a:r>
-            <a:endParaRPr lang="en-US"/>
           </a:p>
           <a:p>
             <a:pPr lvl="3"/>
@@ -298,7 +296,6 @@
               <a:rPr lang="en-US"/>
               <a:t>Fourth level</a:t>
             </a:r>
-            <a:endParaRPr lang="en-US"/>
           </a:p>
           <a:p>
             <a:pPr lvl="4"/>
@@ -306,7 +303,6 @@
               <a:rPr lang="en-US"/>
               <a:t>Fifth level</a:t>
             </a:r>
-            <a:endParaRPr lang="en-US"/>
           </a:p>
         </p:txBody>
       </p:sp>
@@ -370,6 +366,7 @@
           <a:p>
             <a:fld id="{21B2AA4F-B828-4D7C-AFD3-893933DAFCB4}" type="slidenum">
               <a:rPr lang="en-US" smtClean="0"/>
+              <a:t>‹#›</a:t>
             </a:fld>
             <a:endParaRPr lang="en-US"/>
           </a:p>
@@ -482,12 +479,19 @@
         <p:cNvGrpSpPr/>
         <p:nvPr/>
       </p:nvGrpSpPr>
-      <p:grpSpPr/>
+      <p:grpSpPr>
+        <a:xfrm>
+          <a:off x="0" y="0"/>
+          <a:ext cx="0" cy="0"/>
+          <a:chOff x="0" y="0"/>
+          <a:chExt cx="0" cy="0"/>
+        </a:xfrm>
+      </p:grpSpPr>
       <p:sp>
         <p:nvSpPr>
           <p:cNvPr id="2" name="Slide Image Placeholder 1"/>
           <p:cNvSpPr>
-            <a:spLocks noGrp="1"/>
+            <a:spLocks noGrp="1" noRot="1" noChangeAspect="1"/>
           </p:cNvSpPr>
           <p:nvPr>
             <p:ph type="sldImg" idx="2"/>
@@ -508,12 +512,15 @@
         <p:spPr/>
         <p:txBody>
           <a:bodyPr/>
-          <a:p>
-            <a:r>
-              <a:rPr lang="en-US"/>
+          <a:lstStyle/>
+          <a:p>
+            <a:r>
+              <a:rPr lang="en-US" dirty="0">
+                <a:latin typeface="Courier New" panose="02070309020205020404" pitchFamily="49" charset="0"/>
+                <a:cs typeface="Courier New" panose="02070309020205020404" pitchFamily="49" charset="0"/>
+              </a:rPr>
               <a:t>[Presenter Note]</a:t>
             </a:r>
-            <a:endParaRPr lang="en-US"/>
           </a:p>
         </p:txBody>
       </p:sp>
@@ -570,7 +577,6 @@
               <a:rPr lang="en-US"/>
               <a:t>Click to edit Master title style</a:t>
             </a:r>
-            <a:endParaRPr lang="en-US"/>
           </a:p>
         </p:txBody>
       </p:sp>
@@ -635,7 +641,6 @@
               <a:rPr lang="en-US"/>
               <a:t>Click to edit Master subtitle style</a:t>
             </a:r>
-            <a:endParaRPr lang="en-US"/>
           </a:p>
         </p:txBody>
       </p:sp>
@@ -656,6 +661,7 @@
           <a:p>
             <a:fld id="{63A1C593-65D0-4073-BCC9-577B9352EA97}" type="datetimeFigureOut">
               <a:rPr lang="en-US" smtClean="0"/>
+              <a:t>4/22/26</a:t>
             </a:fld>
             <a:endParaRPr lang="en-US"/>
           </a:p>
@@ -680,7 +686,6 @@
               <a:rPr lang="en-US"/>
               <a:t>[Copyright Info]</a:t>
             </a:r>
-            <a:endParaRPr lang="en-US"/>
           </a:p>
         </p:txBody>
       </p:sp>
@@ -701,6 +706,7 @@
           <a:p>
             <a:fld id="{9B618960-8005-486C-9A75-10CB2AAC16F9}" type="slidenum">
               <a:rPr lang="en-US" smtClean="0"/>
+              <a:t>‹#›</a:t>
             </a:fld>
             <a:endParaRPr lang="en-US"/>
           </a:p>
@@ -751,7 +757,6 @@
               <a:rPr lang="en-US"/>
               <a:t>Click to edit Master title style</a:t>
             </a:r>
-            <a:endParaRPr lang="en-US"/>
           </a:p>
         </p:txBody>
       </p:sp>
@@ -775,7 +780,6 @@
               <a:rPr lang="en-US"/>
               <a:t>Click to edit Master text styles</a:t>
             </a:r>
-            <a:endParaRPr lang="en-US"/>
           </a:p>
           <a:p>
             <a:pPr lvl="1"/>
@@ -783,7 +787,6 @@
               <a:rPr lang="en-US"/>
               <a:t>Second level</a:t>
             </a:r>
-            <a:endParaRPr lang="en-US"/>
           </a:p>
           <a:p>
             <a:pPr lvl="2"/>
@@ -791,7 +794,6 @@
               <a:rPr lang="en-US"/>
               <a:t>Third level</a:t>
             </a:r>
-            <a:endParaRPr lang="en-US"/>
           </a:p>
           <a:p>
             <a:pPr lvl="3"/>
@@ -799,7 +801,6 @@
               <a:rPr lang="en-US"/>
               <a:t>Fourth level</a:t>
             </a:r>
-            <a:endParaRPr lang="en-US"/>
           </a:p>
           <a:p>
             <a:pPr lvl="4"/>
@@ -807,7 +808,6 @@
               <a:rPr lang="en-US"/>
               <a:t>Fifth level</a:t>
             </a:r>
-            <a:endParaRPr lang="en-US"/>
           </a:p>
         </p:txBody>
       </p:sp>
@@ -828,6 +828,7 @@
           <a:p>
             <a:fld id="{63A1C593-65D0-4073-BCC9-577B9352EA97}" type="datetimeFigureOut">
               <a:rPr lang="en-US" smtClean="0"/>
+              <a:t>4/22/26</a:t>
             </a:fld>
             <a:endParaRPr lang="en-US"/>
           </a:p>
@@ -852,7 +853,6 @@
               <a:rPr lang="en-US"/>
               <a:t>[Copyright Info]</a:t>
             </a:r>
-            <a:endParaRPr lang="en-US"/>
           </a:p>
         </p:txBody>
       </p:sp>
@@ -873,6 +873,7 @@
           <a:p>
             <a:fld id="{9B618960-8005-486C-9A75-10CB2AAC16F9}" type="slidenum">
               <a:rPr lang="en-US" smtClean="0"/>
+              <a:t>‹#›</a:t>
             </a:fld>
             <a:endParaRPr lang="en-US"/>
           </a:p>
@@ -928,7 +929,6 @@
               <a:rPr lang="en-US"/>
               <a:t>Click to edit Master title style</a:t>
             </a:r>
-            <a:endParaRPr lang="en-US"/>
           </a:p>
         </p:txBody>
       </p:sp>
@@ -957,7 +957,6 @@
               <a:rPr lang="en-US"/>
               <a:t>Click to edit Master text styles</a:t>
             </a:r>
-            <a:endParaRPr lang="en-US"/>
           </a:p>
           <a:p>
             <a:pPr lvl="1"/>
@@ -965,7 +964,6 @@
               <a:rPr lang="en-US"/>
               <a:t>Second level</a:t>
             </a:r>
-            <a:endParaRPr lang="en-US"/>
           </a:p>
           <a:p>
             <a:pPr lvl="2"/>
@@ -973,7 +971,6 @@
               <a:rPr lang="en-US"/>
               <a:t>Third level</a:t>
             </a:r>
-            <a:endParaRPr lang="en-US"/>
           </a:p>
           <a:p>
             <a:pPr lvl="3"/>
@@ -981,7 +978,6 @@
               <a:rPr lang="en-US"/>
               <a:t>Fourth level</a:t>
             </a:r>
-            <a:endParaRPr lang="en-US"/>
           </a:p>
           <a:p>
             <a:pPr lvl="4"/>
@@ -989,7 +985,6 @@
               <a:rPr lang="en-US"/>
               <a:t>Fifth level</a:t>
             </a:r>
-            <a:endParaRPr lang="en-US"/>
           </a:p>
         </p:txBody>
       </p:sp>
@@ -1010,6 +1005,7 @@
           <a:p>
             <a:fld id="{63A1C593-65D0-4073-BCC9-577B9352EA97}" type="datetimeFigureOut">
               <a:rPr lang="en-US" smtClean="0"/>
+              <a:t>4/22/26</a:t>
             </a:fld>
             <a:endParaRPr lang="en-US"/>
           </a:p>
@@ -1034,7 +1030,6 @@
               <a:rPr lang="en-US"/>
               <a:t>[Copyright Info]</a:t>
             </a:r>
-            <a:endParaRPr lang="en-US"/>
           </a:p>
         </p:txBody>
       </p:sp>
@@ -1055,6 +1050,7 @@
           <a:p>
             <a:fld id="{9B618960-8005-486C-9A75-10CB2AAC16F9}" type="slidenum">
               <a:rPr lang="en-US" smtClean="0"/>
+              <a:t>‹#›</a:t>
             </a:fld>
             <a:endParaRPr lang="en-US"/>
           </a:p>
@@ -1105,7 +1101,6 @@
               <a:rPr lang="en-US"/>
               <a:t>Click to edit Master title style</a:t>
             </a:r>
-            <a:endParaRPr lang="en-US"/>
           </a:p>
         </p:txBody>
       </p:sp>
@@ -1129,7 +1124,6 @@
               <a:rPr lang="en-US"/>
               <a:t>Click to edit Master text styles</a:t>
             </a:r>
-            <a:endParaRPr lang="en-US"/>
           </a:p>
           <a:p>
             <a:pPr lvl="1"/>
@@ -1137,7 +1131,6 @@
               <a:rPr lang="en-US"/>
               <a:t>Second level</a:t>
             </a:r>
-            <a:endParaRPr lang="en-US"/>
           </a:p>
           <a:p>
             <a:pPr lvl="2"/>
@@ -1145,7 +1138,6 @@
               <a:rPr lang="en-US"/>
               <a:t>Third level</a:t>
             </a:r>
-            <a:endParaRPr lang="en-US"/>
           </a:p>
           <a:p>
             <a:pPr lvl="3"/>
@@ -1153,7 +1145,6 @@
               <a:rPr lang="en-US"/>
               <a:t>Fourth level</a:t>
             </a:r>
-            <a:endParaRPr lang="en-US"/>
           </a:p>
           <a:p>
             <a:pPr lvl="4"/>
@@ -1161,7 +1152,6 @@
               <a:rPr lang="en-US"/>
               <a:t>Fifth level</a:t>
             </a:r>
-            <a:endParaRPr lang="en-US"/>
           </a:p>
         </p:txBody>
       </p:sp>
@@ -1182,6 +1172,7 @@
           <a:p>
             <a:fld id="{63A1C593-65D0-4073-BCC9-577B9352EA97}" type="datetimeFigureOut">
               <a:rPr lang="en-US" smtClean="0"/>
+              <a:t>4/22/26</a:t>
             </a:fld>
             <a:endParaRPr lang="en-US"/>
           </a:p>
@@ -1206,7 +1197,6 @@
               <a:rPr lang="en-US"/>
               <a:t>[Copyright Info]</a:t>
             </a:r>
-            <a:endParaRPr lang="en-US"/>
           </a:p>
         </p:txBody>
       </p:sp>
@@ -1227,6 +1217,7 @@
           <a:p>
             <a:fld id="{9B618960-8005-486C-9A75-10CB2AAC16F9}" type="slidenum">
               <a:rPr lang="en-US" smtClean="0"/>
+              <a:t>‹#›</a:t>
             </a:fld>
             <a:endParaRPr lang="en-US"/>
           </a:p>
@@ -1286,7 +1277,6 @@
               <a:rPr lang="en-US"/>
               <a:t>Click to edit Master title style</a:t>
             </a:r>
-            <a:endParaRPr lang="en-US"/>
           </a:p>
         </p:txBody>
       </p:sp>
@@ -1406,7 +1396,6 @@
               <a:rPr lang="en-US"/>
               <a:t>Click to edit Master text styles</a:t>
             </a:r>
-            <a:endParaRPr lang="en-US"/>
           </a:p>
         </p:txBody>
       </p:sp>
@@ -1427,6 +1416,7 @@
           <a:p>
             <a:fld id="{63A1C593-65D0-4073-BCC9-577B9352EA97}" type="datetimeFigureOut">
               <a:rPr lang="en-US" smtClean="0"/>
+              <a:t>4/22/26</a:t>
             </a:fld>
             <a:endParaRPr lang="en-US"/>
           </a:p>
@@ -1451,7 +1441,6 @@
               <a:rPr lang="en-US"/>
               <a:t>[Copyright Info]</a:t>
             </a:r>
-            <a:endParaRPr lang="en-US"/>
           </a:p>
         </p:txBody>
       </p:sp>
@@ -1472,6 +1461,7 @@
           <a:p>
             <a:fld id="{9B618960-8005-486C-9A75-10CB2AAC16F9}" type="slidenum">
               <a:rPr lang="en-US" smtClean="0"/>
+              <a:t>‹#›</a:t>
             </a:fld>
             <a:endParaRPr lang="en-US"/>
           </a:p>
@@ -1522,7 +1512,6 @@
               <a:rPr lang="en-US"/>
               <a:t>Click to edit Master title style</a:t>
             </a:r>
-            <a:endParaRPr lang="en-US"/>
           </a:p>
         </p:txBody>
       </p:sp>
@@ -1551,7 +1540,6 @@
               <a:rPr lang="en-US"/>
               <a:t>Click to edit Master text styles</a:t>
             </a:r>
-            <a:endParaRPr lang="en-US"/>
           </a:p>
           <a:p>
             <a:pPr lvl="1"/>
@@ -1559,7 +1547,6 @@
               <a:rPr lang="en-US"/>
               <a:t>Second level</a:t>
             </a:r>
-            <a:endParaRPr lang="en-US"/>
           </a:p>
           <a:p>
             <a:pPr lvl="2"/>
@@ -1567,7 +1554,6 @@
               <a:rPr lang="en-US"/>
               <a:t>Third level</a:t>
             </a:r>
-            <a:endParaRPr lang="en-US"/>
           </a:p>
           <a:p>
             <a:pPr lvl="3"/>
@@ -1575,7 +1561,6 @@
               <a:rPr lang="en-US"/>
               <a:t>Fourth level</a:t>
             </a:r>
-            <a:endParaRPr lang="en-US"/>
           </a:p>
           <a:p>
             <a:pPr lvl="4"/>
@@ -1583,7 +1568,6 @@
               <a:rPr lang="en-US"/>
               <a:t>Fifth level</a:t>
             </a:r>
-            <a:endParaRPr lang="en-US"/>
           </a:p>
         </p:txBody>
       </p:sp>
@@ -1612,7 +1596,6 @@
               <a:rPr lang="en-US"/>
               <a:t>Click to edit Master text styles</a:t>
             </a:r>
-            <a:endParaRPr lang="en-US"/>
           </a:p>
           <a:p>
             <a:pPr lvl="1"/>
@@ -1620,7 +1603,6 @@
               <a:rPr lang="en-US"/>
               <a:t>Second level</a:t>
             </a:r>
-            <a:endParaRPr lang="en-US"/>
           </a:p>
           <a:p>
             <a:pPr lvl="2"/>
@@ -1628,7 +1610,6 @@
               <a:rPr lang="en-US"/>
               <a:t>Third level</a:t>
             </a:r>
-            <a:endParaRPr lang="en-US"/>
           </a:p>
           <a:p>
             <a:pPr lvl="3"/>
@@ -1636,7 +1617,6 @@
               <a:rPr lang="en-US"/>
               <a:t>Fourth level</a:t>
             </a:r>
-            <a:endParaRPr lang="en-US"/>
           </a:p>
           <a:p>
             <a:pPr lvl="4"/>
@@ -1644,7 +1624,6 @@
               <a:rPr lang="en-US"/>
               <a:t>Fifth level</a:t>
             </a:r>
-            <a:endParaRPr lang="en-US"/>
           </a:p>
         </p:txBody>
       </p:sp>
@@ -1665,6 +1644,7 @@
           <a:p>
             <a:fld id="{63A1C593-65D0-4073-BCC9-577B9352EA97}" type="datetimeFigureOut">
               <a:rPr lang="en-US" smtClean="0"/>
+              <a:t>4/22/26</a:t>
             </a:fld>
             <a:endParaRPr lang="en-US"/>
           </a:p>
@@ -1689,7 +1669,6 @@
               <a:rPr lang="en-US"/>
               <a:t>[Copyright Info]</a:t>
             </a:r>
-            <a:endParaRPr lang="en-US"/>
           </a:p>
         </p:txBody>
       </p:sp>
@@ -1710,6 +1689,7 @@
           <a:p>
             <a:fld id="{9B618960-8005-486C-9A75-10CB2AAC16F9}" type="slidenum">
               <a:rPr lang="en-US" smtClean="0"/>
+              <a:t>‹#›</a:t>
             </a:fld>
             <a:endParaRPr lang="en-US"/>
           </a:p>
@@ -1765,7 +1745,6 @@
               <a:rPr lang="en-US"/>
               <a:t>Click to edit Master title style</a:t>
             </a:r>
-            <a:endParaRPr lang="en-US"/>
           </a:p>
         </p:txBody>
       </p:sp>
@@ -1831,7 +1810,6 @@
               <a:rPr lang="en-US"/>
               <a:t>Click to edit Master text styles</a:t>
             </a:r>
-            <a:endParaRPr lang="en-US"/>
           </a:p>
         </p:txBody>
       </p:sp>
@@ -1860,7 +1838,6 @@
               <a:rPr lang="en-US"/>
               <a:t>Click to edit Master text styles</a:t>
             </a:r>
-            <a:endParaRPr lang="en-US"/>
           </a:p>
           <a:p>
             <a:pPr lvl="1"/>
@@ -1868,7 +1845,6 @@
               <a:rPr lang="en-US"/>
               <a:t>Second level</a:t>
             </a:r>
-            <a:endParaRPr lang="en-US"/>
           </a:p>
           <a:p>
             <a:pPr lvl="2"/>
@@ -1876,7 +1852,6 @@
               <a:rPr lang="en-US"/>
               <a:t>Third level</a:t>
             </a:r>
-            <a:endParaRPr lang="en-US"/>
           </a:p>
           <a:p>
             <a:pPr lvl="3"/>
@@ -1884,7 +1859,6 @@
               <a:rPr lang="en-US"/>
               <a:t>Fourth level</a:t>
             </a:r>
-            <a:endParaRPr lang="en-US"/>
           </a:p>
           <a:p>
             <a:pPr lvl="4"/>
@@ -1892,7 +1866,6 @@
               <a:rPr lang="en-US"/>
               <a:t>Fifth level</a:t>
             </a:r>
-            <a:endParaRPr lang="en-US"/>
           </a:p>
         </p:txBody>
       </p:sp>
@@ -1958,7 +1931,6 @@
               <a:rPr lang="en-US"/>
               <a:t>Click to edit Master text styles</a:t>
             </a:r>
-            <a:endParaRPr lang="en-US"/>
           </a:p>
         </p:txBody>
       </p:sp>
@@ -1987,7 +1959,6 @@
               <a:rPr lang="en-US"/>
               <a:t>Click to edit Master text styles</a:t>
             </a:r>
-            <a:endParaRPr lang="en-US"/>
           </a:p>
           <a:p>
             <a:pPr lvl="1"/>
@@ -1995,7 +1966,6 @@
               <a:rPr lang="en-US"/>
               <a:t>Second level</a:t>
             </a:r>
-            <a:endParaRPr lang="en-US"/>
           </a:p>
           <a:p>
             <a:pPr lvl="2"/>
@@ -2003,7 +1973,6 @@
               <a:rPr lang="en-US"/>
               <a:t>Third level</a:t>
             </a:r>
-            <a:endParaRPr lang="en-US"/>
           </a:p>
           <a:p>
             <a:pPr lvl="3"/>
@@ -2011,7 +1980,6 @@
               <a:rPr lang="en-US"/>
               <a:t>Fourth level</a:t>
             </a:r>
-            <a:endParaRPr lang="en-US"/>
           </a:p>
           <a:p>
             <a:pPr lvl="4"/>
@@ -2019,7 +1987,6 @@
               <a:rPr lang="en-US"/>
               <a:t>Fifth level</a:t>
             </a:r>
-            <a:endParaRPr lang="en-US"/>
           </a:p>
         </p:txBody>
       </p:sp>
@@ -2040,6 +2007,7 @@
           <a:p>
             <a:fld id="{63A1C593-65D0-4073-BCC9-577B9352EA97}" type="datetimeFigureOut">
               <a:rPr lang="en-US" smtClean="0"/>
+              <a:t>4/22/26</a:t>
             </a:fld>
             <a:endParaRPr lang="en-US"/>
           </a:p>
@@ -2064,7 +2032,6 @@
               <a:rPr lang="en-US"/>
               <a:t>[Copyright Info]</a:t>
             </a:r>
-            <a:endParaRPr lang="en-US"/>
           </a:p>
         </p:txBody>
       </p:sp>
@@ -2085,6 +2052,7 @@
           <a:p>
             <a:fld id="{9B618960-8005-486C-9A75-10CB2AAC16F9}" type="slidenum">
               <a:rPr lang="en-US" smtClean="0"/>
+              <a:t>‹#›</a:t>
             </a:fld>
             <a:endParaRPr lang="en-US"/>
           </a:p>
@@ -2135,7 +2103,6 @@
               <a:rPr lang="en-US"/>
               <a:t>Click to edit Master title style</a:t>
             </a:r>
-            <a:endParaRPr lang="en-US"/>
           </a:p>
         </p:txBody>
       </p:sp>
@@ -2156,6 +2123,7 @@
           <a:p>
             <a:fld id="{63A1C593-65D0-4073-BCC9-577B9352EA97}" type="datetimeFigureOut">
               <a:rPr lang="en-US" smtClean="0"/>
+              <a:t>4/22/26</a:t>
             </a:fld>
             <a:endParaRPr lang="en-US"/>
           </a:p>
@@ -2180,7 +2148,6 @@
               <a:rPr lang="en-US"/>
               <a:t>[Copyright Info]</a:t>
             </a:r>
-            <a:endParaRPr lang="en-US"/>
           </a:p>
         </p:txBody>
       </p:sp>
@@ -2201,6 +2168,7 @@
           <a:p>
             <a:fld id="{9B618960-8005-486C-9A75-10CB2AAC16F9}" type="slidenum">
               <a:rPr lang="en-US" smtClean="0"/>
+              <a:t>‹#›</a:t>
             </a:fld>
             <a:endParaRPr lang="en-US"/>
           </a:p>
@@ -2249,6 +2217,7 @@
           <a:p>
             <a:fld id="{63A1C593-65D0-4073-BCC9-577B9352EA97}" type="datetimeFigureOut">
               <a:rPr lang="en-US" smtClean="0"/>
+              <a:t>4/22/26</a:t>
             </a:fld>
             <a:endParaRPr lang="en-US"/>
           </a:p>
@@ -2273,7 +2242,6 @@
               <a:rPr lang="en-US"/>
               <a:t>[Copyright Info]</a:t>
             </a:r>
-            <a:endParaRPr lang="en-US"/>
           </a:p>
         </p:txBody>
       </p:sp>
@@ -2294,6 +2262,7 @@
           <a:p>
             <a:fld id="{9B618960-8005-486C-9A75-10CB2AAC16F9}" type="slidenum">
               <a:rPr lang="en-US" smtClean="0"/>
+              <a:t>‹#›</a:t>
             </a:fld>
             <a:endParaRPr lang="en-US"/>
           </a:p>
@@ -2353,7 +2322,6 @@
               <a:rPr lang="en-US"/>
               <a:t>Click to edit Master title style</a:t>
             </a:r>
-            <a:endParaRPr lang="en-US"/>
           </a:p>
         </p:txBody>
       </p:sp>
@@ -2410,7 +2378,6 @@
               <a:rPr lang="en-US"/>
               <a:t>Click to edit Master text styles</a:t>
             </a:r>
-            <a:endParaRPr lang="en-US"/>
           </a:p>
           <a:p>
             <a:pPr lvl="1"/>
@@ -2418,7 +2385,6 @@
               <a:rPr lang="en-US"/>
               <a:t>Second level</a:t>
             </a:r>
-            <a:endParaRPr lang="en-US"/>
           </a:p>
           <a:p>
             <a:pPr lvl="2"/>
@@ -2426,7 +2392,6 @@
               <a:rPr lang="en-US"/>
               <a:t>Third level</a:t>
             </a:r>
-            <a:endParaRPr lang="en-US"/>
           </a:p>
           <a:p>
             <a:pPr lvl="3"/>
@@ -2434,7 +2399,6 @@
               <a:rPr lang="en-US"/>
               <a:t>Fourth level</a:t>
             </a:r>
-            <a:endParaRPr lang="en-US"/>
           </a:p>
           <a:p>
             <a:pPr lvl="4"/>
@@ -2442,7 +2406,6 @@
               <a:rPr lang="en-US"/>
               <a:t>Fifth level</a:t>
             </a:r>
-            <a:endParaRPr lang="en-US"/>
           </a:p>
         </p:txBody>
       </p:sp>
@@ -2508,7 +2471,6 @@
               <a:rPr lang="en-US"/>
               <a:t>Click to edit Master text styles</a:t>
             </a:r>
-            <a:endParaRPr lang="en-US"/>
           </a:p>
         </p:txBody>
       </p:sp>
@@ -2529,6 +2491,7 @@
           <a:p>
             <a:fld id="{63A1C593-65D0-4073-BCC9-577B9352EA97}" type="datetimeFigureOut">
               <a:rPr lang="en-US" smtClean="0"/>
+              <a:t>4/22/26</a:t>
             </a:fld>
             <a:endParaRPr lang="en-US"/>
           </a:p>
@@ -2553,7 +2516,6 @@
               <a:rPr lang="en-US"/>
               <a:t>[Copyright Info]</a:t>
             </a:r>
-            <a:endParaRPr lang="en-US"/>
           </a:p>
         </p:txBody>
       </p:sp>
@@ -2574,6 +2536,7 @@
           <a:p>
             <a:fld id="{9B618960-8005-486C-9A75-10CB2AAC16F9}" type="slidenum">
               <a:rPr lang="en-US" smtClean="0"/>
+              <a:t>‹#›</a:t>
             </a:fld>
             <a:endParaRPr lang="en-US"/>
           </a:p>
@@ -2633,7 +2596,6 @@
               <a:rPr lang="en-US"/>
               <a:t>Click to edit Master title style</a:t>
             </a:r>
-            <a:endParaRPr lang="en-US"/>
           </a:p>
         </p:txBody>
       </p:sp>
@@ -2760,7 +2722,6 @@
               <a:rPr lang="en-US"/>
               <a:t>Click to edit Master text styles</a:t>
             </a:r>
-            <a:endParaRPr lang="en-US"/>
           </a:p>
         </p:txBody>
       </p:sp>
@@ -2781,6 +2742,7 @@
           <a:p>
             <a:fld id="{63A1C593-65D0-4073-BCC9-577B9352EA97}" type="datetimeFigureOut">
               <a:rPr lang="en-US" smtClean="0"/>
+              <a:t>4/22/26</a:t>
             </a:fld>
             <a:endParaRPr lang="en-US"/>
           </a:p>
@@ -2805,7 +2767,6 @@
               <a:rPr lang="en-US"/>
               <a:t>[Copyright Info]</a:t>
             </a:r>
-            <a:endParaRPr lang="en-US"/>
           </a:p>
         </p:txBody>
       </p:sp>
@@ -2826,6 +2787,7 @@
           <a:p>
             <a:fld id="{9B618960-8005-486C-9A75-10CB2AAC16F9}" type="slidenum">
               <a:rPr lang="en-US" smtClean="0"/>
+              <a:t>‹#›</a:t>
             </a:fld>
             <a:endParaRPr lang="en-US"/>
           </a:p>
@@ -2891,7 +2853,6 @@
               <a:rPr lang="en-US"/>
               <a:t>Click to edit Master title style</a:t>
             </a:r>
-            <a:endParaRPr lang="en-US"/>
           </a:p>
         </p:txBody>
       </p:sp>
@@ -2925,7 +2886,6 @@
               <a:rPr lang="en-US"/>
               <a:t>Click to edit Master text styles</a:t>
             </a:r>
-            <a:endParaRPr lang="en-US"/>
           </a:p>
           <a:p>
             <a:pPr lvl="1"/>
@@ -2933,7 +2893,6 @@
               <a:rPr lang="en-US"/>
               <a:t>Second level</a:t>
             </a:r>
-            <a:endParaRPr lang="en-US"/>
           </a:p>
           <a:p>
             <a:pPr lvl="2"/>
@@ -2941,7 +2900,6 @@
               <a:rPr lang="en-US"/>
               <a:t>Third level</a:t>
             </a:r>
-            <a:endParaRPr lang="en-US"/>
           </a:p>
           <a:p>
             <a:pPr lvl="3"/>
@@ -2949,7 +2907,6 @@
               <a:rPr lang="en-US"/>
               <a:t>Fourth level</a:t>
             </a:r>
-            <a:endParaRPr lang="en-US"/>
           </a:p>
           <a:p>
             <a:pPr lvl="4"/>
@@ -2957,7 +2914,6 @@
               <a:rPr lang="en-US"/>
               <a:t>Fifth level</a:t>
             </a:r>
-            <a:endParaRPr lang="en-US"/>
           </a:p>
         </p:txBody>
       </p:sp>
@@ -2996,6 +2952,7 @@
           <a:p>
             <a:fld id="{63A1C593-65D0-4073-BCC9-577B9352EA97}" type="datetimeFigureOut">
               <a:rPr lang="en-US" smtClean="0"/>
+              <a:t>4/22/26</a:t>
             </a:fld>
             <a:endParaRPr lang="en-US"/>
           </a:p>
@@ -3038,7 +2995,6 @@
               <a:rPr lang="en-US"/>
               <a:t>[Copyright Info]</a:t>
             </a:r>
-            <a:endParaRPr lang="en-US"/>
           </a:p>
         </p:txBody>
       </p:sp>
@@ -3077,6 +3033,7 @@
           <a:p>
             <a:fld id="{9B618960-8005-486C-9A75-10CB2AAC16F9}" type="slidenum">
               <a:rPr lang="en-US" smtClean="0"/>
+              <a:t>‹#›</a:t>
             </a:fld>
             <a:endParaRPr lang="en-US"/>
           </a:p>
@@ -3090,12 +3047,12 @@
           </p:cNvPicPr>
           <p:nvPr userDrawn="1">
             <p:custDataLst>
-              <p:tags r:id="rId12"/>
+              <p:tags r:id="rId13"/>
             </p:custDataLst>
           </p:nvPr>
         </p:nvPicPr>
         <p:blipFill>
-          <a:blip r:embed="rId13">
+          <a:blip r:embed="rId15">
             <a:extLst>
               <a:ext uri="{28A0092B-C50C-407E-A947-70E740481C1C}">
                 <a14:useLocalDpi xmlns:a14="http://schemas.microsoft.com/office/drawing/2010/main" val="0"/>
@@ -3194,7 +3151,7 @@
           </p:nvPr>
         </p:nvPicPr>
         <p:blipFill>
-          <a:blip r:embed="rId13">
+          <a:blip r:embed="rId15">
             <a:extLst>
               <a:ext uri="{28A0092B-C50C-407E-A947-70E740481C1C}">
                 <a14:useLocalDpi xmlns:a14="http://schemas.microsoft.com/office/drawing/2010/main" val="0"/>
@@ -3628,11 +3585,6 @@
               </a:rPr>
               <a:t>[LYRICS AND CHORDS]</a:t>
             </a:r>
-            <a:endParaRPr lang="en-US" dirty="0">
-              <a:latin typeface="Times New Roman Regular" panose="02020603050405020304" charset="0"/>
-              <a:cs typeface="Times New Roman Regular" panose="02020603050405020304" charset="0"/>
-              <a:sym typeface="+mn-ea"/>
-            </a:endParaRPr>
           </a:p>
         </p:txBody>
       </p:sp>
@@ -3663,10 +3615,6 @@
               </a:rPr>
               <a:t>[Title]</a:t>
             </a:r>
-            <a:endParaRPr lang="en-US" sz="2400" dirty="0">
-              <a:latin typeface="Times New Roman Regular" panose="02020603050405020304" charset="0"/>
-              <a:cs typeface="Times New Roman Regular" panose="02020603050405020304" charset="0"/>
-            </a:endParaRPr>
           </a:p>
         </p:txBody>
       </p:sp>
@@ -3698,10 +3646,6 @@
               </a:rPr>
               <a:t>[Copyright Info]</a:t>
             </a:r>
-            <a:endParaRPr lang="en-US" dirty="0">
-              <a:latin typeface="Times New Roman Regular" panose="02020603050405020304" charset="0"/>
-              <a:cs typeface="Times New Roman Regular" panose="02020603050405020304" charset="0"/>
-            </a:endParaRPr>
           </a:p>
         </p:txBody>
       </p:sp>
@@ -3717,7 +3661,7 @@
 </file>
 
 <file path=ppt/tags/tag1.xml><?xml version="1.0" encoding="utf-8"?>
-<p:tagLst xmlns:p="http://schemas.openxmlformats.org/presentationml/2006/main">
+<p:tagLst xmlns:a="http://schemas.openxmlformats.org/drawingml/2006/main" xmlns:r="http://schemas.openxmlformats.org/officeDocument/2006/relationships" xmlns:p="http://schemas.openxmlformats.org/presentationml/2006/main">
   <p:tag name="KSO_WM_UNIT_HIGHLIGHT" val="0"/>
   <p:tag name="KSO_WM_UNIT_COMPATIBLE" val="0"/>
   <p:tag name="KSO_WM_UNIT_DIAGRAM_ISNUMVISUAL" val="0"/>
@@ -3732,7 +3676,7 @@
 </file>
 
 <file path=ppt/tags/tag2.xml><?xml version="1.0" encoding="utf-8"?>
-<p:tagLst xmlns:p="http://schemas.openxmlformats.org/presentationml/2006/main">
+<p:tagLst xmlns:a="http://schemas.openxmlformats.org/drawingml/2006/main" xmlns:r="http://schemas.openxmlformats.org/officeDocument/2006/relationships" xmlns:p="http://schemas.openxmlformats.org/presentationml/2006/main">
   <p:tag name="KSO_WM_UNIT_HIGHLIGHT" val="0"/>
   <p:tag name="KSO_WM_UNIT_COMPATIBLE" val="0"/>
   <p:tag name="KSO_WM_UNIT_DIAGRAM_ISNUMVISUAL" val="0"/>
@@ -3747,7 +3691,7 @@
 </file>
 
 <file path=ppt/tags/tag3.xml><?xml version="1.0" encoding="utf-8"?>
-<p:tagLst xmlns:p="http://schemas.openxmlformats.org/presentationml/2006/main">
+<p:tagLst xmlns:a="http://schemas.openxmlformats.org/drawingml/2006/main" xmlns:r="http://schemas.openxmlformats.org/officeDocument/2006/relationships" xmlns:p="http://schemas.openxmlformats.org/presentationml/2006/main">
   <p:tag name="KSO_WM_SLIDE_TYPE" val="text"/>
   <p:tag name="KSO_WM_BEAUTIFY_FLAG" val="#wm#"/>
   <p:tag name="KSO_WM_SLIDE_THEME_ID" val="3312678"/>
@@ -4006,6 +3950,8 @@
       </a:bgFillStyleLst>
     </a:fmtScheme>
   </a:themeElements>
+  <a:objectDefaults/>
+  <a:extraClrSchemeLst/>
   <a:extLst>
     <a:ext uri="{05A4C25C-085E-4340-85A3-A5531E510DB2}">
       <thm15:themeFamily xmlns:thm15="http://schemas.microsoft.com/office/thememl/2012/main" name="Office Theme" id="{62F939B6-93AF-4DB8-9C6B-D6C7DFDC589F}" vid="{4A3C46E8-61CC-4603-A589-7422A47A8E4A}"/>
@@ -4265,6 +4211,8 @@
       </a:bgFillStyleLst>
     </a:fmtScheme>
   </a:themeElements>
+  <a:objectDefaults/>
+  <a:extraClrSchemeLst/>
   <a:extLst>
     <a:ext uri="{05A4C25C-085E-4340-85A3-A5531E510DB2}">
       <thm15:themeFamily xmlns:thm15="http://schemas.microsoft.com/office/thememl/2012/main" name="Office Theme" id="{62F939B6-93AF-4DB8-9C6B-D6C7DFDC589F}" vid="{4A3C46E8-61CC-4603-A589-7422A47A8E4A}"/>

--- a/Song Template 2.pptx
+++ b/Song Template 2.pptx
@@ -5,10 +5,10 @@
     <p:sldMasterId id="2147483648" r:id="rId1"/>
   </p:sldMasterIdLst>
   <p:notesMasterIdLst>
-    <p:notesMasterId r:id="rId3"/>
+    <p:notesMasterId r:id="rId4"/>
   </p:notesMasterIdLst>
   <p:sldIdLst>
-    <p:sldId id="5001" r:id="rId2"/>
+    <p:sldId id="5001" r:id="rId3"/>
   </p:sldIdLst>
   <p:sldSz cx="12192000" cy="6858000"/>
   <p:notesSz cx="6858000" cy="9144000"/>
@@ -208,7 +208,6 @@
           <a:p>
             <a:fld id="{3EFD42F7-718C-4B98-AAEC-167E6DDD60A7}" type="datetimeFigureOut">
               <a:rPr lang="en-US" smtClean="0"/>
-              <a:t>4/22/26</a:t>
             </a:fld>
             <a:endParaRPr lang="en-US"/>
           </a:p>
@@ -275,6 +274,7 @@
               <a:rPr lang="en-US"/>
               <a:t>Click to edit Master text styles</a:t>
             </a:r>
+            <a:endParaRPr lang="en-US"/>
           </a:p>
           <a:p>
             <a:pPr lvl="1"/>
@@ -282,6 +282,7 @@
               <a:rPr lang="en-US"/>
               <a:t>Second level</a:t>
             </a:r>
+            <a:endParaRPr lang="en-US"/>
           </a:p>
           <a:p>
             <a:pPr lvl="2"/>
@@ -289,6 +290,7 @@
               <a:rPr lang="en-US"/>
               <a:t>Third level</a:t>
             </a:r>
+            <a:endParaRPr lang="en-US"/>
           </a:p>
           <a:p>
             <a:pPr lvl="3"/>
@@ -296,6 +298,7 @@
               <a:rPr lang="en-US"/>
               <a:t>Fourth level</a:t>
             </a:r>
+            <a:endParaRPr lang="en-US"/>
           </a:p>
           <a:p>
             <a:pPr lvl="4"/>
@@ -303,6 +306,7 @@
               <a:rPr lang="en-US"/>
               <a:t>Fifth level</a:t>
             </a:r>
+            <a:endParaRPr lang="en-US"/>
           </a:p>
         </p:txBody>
       </p:sp>
@@ -366,7 +370,6 @@
           <a:p>
             <a:fld id="{21B2AA4F-B828-4D7C-AFD3-893933DAFCB4}" type="slidenum">
               <a:rPr lang="en-US" smtClean="0"/>
-              <a:t>‹#›</a:t>
             </a:fld>
             <a:endParaRPr lang="en-US"/>
           </a:p>
@@ -516,11 +519,15 @@
           <a:p>
             <a:r>
               <a:rPr lang="en-US" dirty="0">
-                <a:latin typeface="Courier New" panose="02070309020205020404" pitchFamily="49" charset="0"/>
-                <a:cs typeface="Courier New" panose="02070309020205020404" pitchFamily="49" charset="0"/>
+                <a:latin typeface="Courier New" panose="02070609020205020404" pitchFamily="49" charset="0"/>
+                <a:cs typeface="Courier New" panose="02070609020205020404" pitchFamily="49" charset="0"/>
               </a:rPr>
               <a:t>[Presenter Note]</a:t>
             </a:r>
+            <a:endParaRPr lang="en-US" dirty="0">
+              <a:latin typeface="Courier New" panose="02070609020205020404" pitchFamily="49" charset="0"/>
+              <a:cs typeface="Courier New" panose="02070609020205020404" pitchFamily="49" charset="0"/>
+            </a:endParaRPr>
           </a:p>
         </p:txBody>
       </p:sp>
@@ -577,6 +584,7 @@
               <a:rPr lang="en-US"/>
               <a:t>Click to edit Master title style</a:t>
             </a:r>
+            <a:endParaRPr lang="en-US"/>
           </a:p>
         </p:txBody>
       </p:sp>
@@ -641,6 +649,7 @@
               <a:rPr lang="en-US"/>
               <a:t>Click to edit Master subtitle style</a:t>
             </a:r>
+            <a:endParaRPr lang="en-US"/>
           </a:p>
         </p:txBody>
       </p:sp>
@@ -661,7 +670,6 @@
           <a:p>
             <a:fld id="{63A1C593-65D0-4073-BCC9-577B9352EA97}" type="datetimeFigureOut">
               <a:rPr lang="en-US" smtClean="0"/>
-              <a:t>4/22/26</a:t>
             </a:fld>
             <a:endParaRPr lang="en-US"/>
           </a:p>
@@ -686,6 +694,7 @@
               <a:rPr lang="en-US"/>
               <a:t>[Copyright Info]</a:t>
             </a:r>
+            <a:endParaRPr lang="en-US"/>
           </a:p>
         </p:txBody>
       </p:sp>
@@ -706,7 +715,6 @@
           <a:p>
             <a:fld id="{9B618960-8005-486C-9A75-10CB2AAC16F9}" type="slidenum">
               <a:rPr lang="en-US" smtClean="0"/>
-              <a:t>‹#›</a:t>
             </a:fld>
             <a:endParaRPr lang="en-US"/>
           </a:p>
@@ -757,6 +765,7 @@
               <a:rPr lang="en-US"/>
               <a:t>Click to edit Master title style</a:t>
             </a:r>
+            <a:endParaRPr lang="en-US"/>
           </a:p>
         </p:txBody>
       </p:sp>
@@ -780,6 +789,7 @@
               <a:rPr lang="en-US"/>
               <a:t>Click to edit Master text styles</a:t>
             </a:r>
+            <a:endParaRPr lang="en-US"/>
           </a:p>
           <a:p>
             <a:pPr lvl="1"/>
@@ -787,6 +797,7 @@
               <a:rPr lang="en-US"/>
               <a:t>Second level</a:t>
             </a:r>
+            <a:endParaRPr lang="en-US"/>
           </a:p>
           <a:p>
             <a:pPr lvl="2"/>
@@ -794,6 +805,7 @@
               <a:rPr lang="en-US"/>
               <a:t>Third level</a:t>
             </a:r>
+            <a:endParaRPr lang="en-US"/>
           </a:p>
           <a:p>
             <a:pPr lvl="3"/>
@@ -801,6 +813,7 @@
               <a:rPr lang="en-US"/>
               <a:t>Fourth level</a:t>
             </a:r>
+            <a:endParaRPr lang="en-US"/>
           </a:p>
           <a:p>
             <a:pPr lvl="4"/>
@@ -808,6 +821,7 @@
               <a:rPr lang="en-US"/>
               <a:t>Fifth level</a:t>
             </a:r>
+            <a:endParaRPr lang="en-US"/>
           </a:p>
         </p:txBody>
       </p:sp>
@@ -828,7 +842,6 @@
           <a:p>
             <a:fld id="{63A1C593-65D0-4073-BCC9-577B9352EA97}" type="datetimeFigureOut">
               <a:rPr lang="en-US" smtClean="0"/>
-              <a:t>4/22/26</a:t>
             </a:fld>
             <a:endParaRPr lang="en-US"/>
           </a:p>
@@ -853,6 +866,7 @@
               <a:rPr lang="en-US"/>
               <a:t>[Copyright Info]</a:t>
             </a:r>
+            <a:endParaRPr lang="en-US"/>
           </a:p>
         </p:txBody>
       </p:sp>
@@ -873,7 +887,6 @@
           <a:p>
             <a:fld id="{9B618960-8005-486C-9A75-10CB2AAC16F9}" type="slidenum">
               <a:rPr lang="en-US" smtClean="0"/>
-              <a:t>‹#›</a:t>
             </a:fld>
             <a:endParaRPr lang="en-US"/>
           </a:p>
@@ -929,6 +942,7 @@
               <a:rPr lang="en-US"/>
               <a:t>Click to edit Master title style</a:t>
             </a:r>
+            <a:endParaRPr lang="en-US"/>
           </a:p>
         </p:txBody>
       </p:sp>
@@ -957,6 +971,7 @@
               <a:rPr lang="en-US"/>
               <a:t>Click to edit Master text styles</a:t>
             </a:r>
+            <a:endParaRPr lang="en-US"/>
           </a:p>
           <a:p>
             <a:pPr lvl="1"/>
@@ -964,6 +979,7 @@
               <a:rPr lang="en-US"/>
               <a:t>Second level</a:t>
             </a:r>
+            <a:endParaRPr lang="en-US"/>
           </a:p>
           <a:p>
             <a:pPr lvl="2"/>
@@ -971,6 +987,7 @@
               <a:rPr lang="en-US"/>
               <a:t>Third level</a:t>
             </a:r>
+            <a:endParaRPr lang="en-US"/>
           </a:p>
           <a:p>
             <a:pPr lvl="3"/>
@@ -978,6 +995,7 @@
               <a:rPr lang="en-US"/>
               <a:t>Fourth level</a:t>
             </a:r>
+            <a:endParaRPr lang="en-US"/>
           </a:p>
           <a:p>
             <a:pPr lvl="4"/>
@@ -985,6 +1003,7 @@
               <a:rPr lang="en-US"/>
               <a:t>Fifth level</a:t>
             </a:r>
+            <a:endParaRPr lang="en-US"/>
           </a:p>
         </p:txBody>
       </p:sp>
@@ -1005,7 +1024,6 @@
           <a:p>
             <a:fld id="{63A1C593-65D0-4073-BCC9-577B9352EA97}" type="datetimeFigureOut">
               <a:rPr lang="en-US" smtClean="0"/>
-              <a:t>4/22/26</a:t>
             </a:fld>
             <a:endParaRPr lang="en-US"/>
           </a:p>
@@ -1030,6 +1048,7 @@
               <a:rPr lang="en-US"/>
               <a:t>[Copyright Info]</a:t>
             </a:r>
+            <a:endParaRPr lang="en-US"/>
           </a:p>
         </p:txBody>
       </p:sp>
@@ -1050,7 +1069,6 @@
           <a:p>
             <a:fld id="{9B618960-8005-486C-9A75-10CB2AAC16F9}" type="slidenum">
               <a:rPr lang="en-US" smtClean="0"/>
-              <a:t>‹#›</a:t>
             </a:fld>
             <a:endParaRPr lang="en-US"/>
           </a:p>
@@ -1101,6 +1119,7 @@
               <a:rPr lang="en-US"/>
               <a:t>Click to edit Master title style</a:t>
             </a:r>
+            <a:endParaRPr lang="en-US"/>
           </a:p>
         </p:txBody>
       </p:sp>
@@ -1117,13 +1136,35 @@
         <p:spPr/>
         <p:txBody>
           <a:bodyPr/>
-          <a:lstStyle/>
+          <a:lstStyle>
+            <a:lvl1pPr marL="0" indent="0">
+              <a:buNone/>
+              <a:defRPr/>
+            </a:lvl1pPr>
+            <a:lvl2pPr marL="457200" indent="0">
+              <a:buNone/>
+              <a:defRPr/>
+            </a:lvl2pPr>
+            <a:lvl3pPr marL="914400" indent="0">
+              <a:buNone/>
+              <a:defRPr/>
+            </a:lvl3pPr>
+            <a:lvl4pPr marL="1371600" indent="0">
+              <a:buNone/>
+              <a:defRPr/>
+            </a:lvl4pPr>
+            <a:lvl5pPr marL="1828800" indent="0">
+              <a:buNone/>
+              <a:defRPr/>
+            </a:lvl5pPr>
+          </a:lstStyle>
           <a:p>
             <a:pPr lvl="0"/>
             <a:r>
               <a:rPr lang="en-US"/>
               <a:t>Click to edit Master text styles</a:t>
             </a:r>
+            <a:endParaRPr lang="en-US"/>
           </a:p>
           <a:p>
             <a:pPr lvl="1"/>
@@ -1131,6 +1172,7 @@
               <a:rPr lang="en-US"/>
               <a:t>Second level</a:t>
             </a:r>
+            <a:endParaRPr lang="en-US"/>
           </a:p>
           <a:p>
             <a:pPr lvl="2"/>
@@ -1138,6 +1180,7 @@
               <a:rPr lang="en-US"/>
               <a:t>Third level</a:t>
             </a:r>
+            <a:endParaRPr lang="en-US"/>
           </a:p>
           <a:p>
             <a:pPr lvl="3"/>
@@ -1145,6 +1188,7 @@
               <a:rPr lang="en-US"/>
               <a:t>Fourth level</a:t>
             </a:r>
+            <a:endParaRPr lang="en-US"/>
           </a:p>
           <a:p>
             <a:pPr lvl="4"/>
@@ -1152,6 +1196,7 @@
               <a:rPr lang="en-US"/>
               <a:t>Fifth level</a:t>
             </a:r>
+            <a:endParaRPr lang="en-US"/>
           </a:p>
         </p:txBody>
       </p:sp>
@@ -1172,7 +1217,6 @@
           <a:p>
             <a:fld id="{63A1C593-65D0-4073-BCC9-577B9352EA97}" type="datetimeFigureOut">
               <a:rPr lang="en-US" smtClean="0"/>
-              <a:t>4/22/26</a:t>
             </a:fld>
             <a:endParaRPr lang="en-US"/>
           </a:p>
@@ -1197,6 +1241,7 @@
               <a:rPr lang="en-US"/>
               <a:t>[Copyright Info]</a:t>
             </a:r>
+            <a:endParaRPr lang="en-US"/>
           </a:p>
         </p:txBody>
       </p:sp>
@@ -1217,7 +1262,6 @@
           <a:p>
             <a:fld id="{9B618960-8005-486C-9A75-10CB2AAC16F9}" type="slidenum">
               <a:rPr lang="en-US" smtClean="0"/>
-              <a:t>‹#›</a:t>
             </a:fld>
             <a:endParaRPr lang="en-US"/>
           </a:p>
@@ -1277,6 +1321,7 @@
               <a:rPr lang="en-US"/>
               <a:t>Click to edit Master title style</a:t>
             </a:r>
+            <a:endParaRPr lang="en-US"/>
           </a:p>
         </p:txBody>
       </p:sp>
@@ -1396,6 +1441,7 @@
               <a:rPr lang="en-US"/>
               <a:t>Click to edit Master text styles</a:t>
             </a:r>
+            <a:endParaRPr lang="en-US"/>
           </a:p>
         </p:txBody>
       </p:sp>
@@ -1416,7 +1462,6 @@
           <a:p>
             <a:fld id="{63A1C593-65D0-4073-BCC9-577B9352EA97}" type="datetimeFigureOut">
               <a:rPr lang="en-US" smtClean="0"/>
-              <a:t>4/22/26</a:t>
             </a:fld>
             <a:endParaRPr lang="en-US"/>
           </a:p>
@@ -1441,6 +1486,7 @@
               <a:rPr lang="en-US"/>
               <a:t>[Copyright Info]</a:t>
             </a:r>
+            <a:endParaRPr lang="en-US"/>
           </a:p>
         </p:txBody>
       </p:sp>
@@ -1461,7 +1507,6 @@
           <a:p>
             <a:fld id="{9B618960-8005-486C-9A75-10CB2AAC16F9}" type="slidenum">
               <a:rPr lang="en-US" smtClean="0"/>
-              <a:t>‹#›</a:t>
             </a:fld>
             <a:endParaRPr lang="en-US"/>
           </a:p>
@@ -1512,6 +1557,7 @@
               <a:rPr lang="en-US"/>
               <a:t>Click to edit Master title style</a:t>
             </a:r>
+            <a:endParaRPr lang="en-US"/>
           </a:p>
         </p:txBody>
       </p:sp>
@@ -1540,6 +1586,7 @@
               <a:rPr lang="en-US"/>
               <a:t>Click to edit Master text styles</a:t>
             </a:r>
+            <a:endParaRPr lang="en-US"/>
           </a:p>
           <a:p>
             <a:pPr lvl="1"/>
@@ -1547,6 +1594,7 @@
               <a:rPr lang="en-US"/>
               <a:t>Second level</a:t>
             </a:r>
+            <a:endParaRPr lang="en-US"/>
           </a:p>
           <a:p>
             <a:pPr lvl="2"/>
@@ -1554,6 +1602,7 @@
               <a:rPr lang="en-US"/>
               <a:t>Third level</a:t>
             </a:r>
+            <a:endParaRPr lang="en-US"/>
           </a:p>
           <a:p>
             <a:pPr lvl="3"/>
@@ -1561,6 +1610,7 @@
               <a:rPr lang="en-US"/>
               <a:t>Fourth level</a:t>
             </a:r>
+            <a:endParaRPr lang="en-US"/>
           </a:p>
           <a:p>
             <a:pPr lvl="4"/>
@@ -1568,6 +1618,7 @@
               <a:rPr lang="en-US"/>
               <a:t>Fifth level</a:t>
             </a:r>
+            <a:endParaRPr lang="en-US"/>
           </a:p>
         </p:txBody>
       </p:sp>
@@ -1596,6 +1647,7 @@
               <a:rPr lang="en-US"/>
               <a:t>Click to edit Master text styles</a:t>
             </a:r>
+            <a:endParaRPr lang="en-US"/>
           </a:p>
           <a:p>
             <a:pPr lvl="1"/>
@@ -1603,6 +1655,7 @@
               <a:rPr lang="en-US"/>
               <a:t>Second level</a:t>
             </a:r>
+            <a:endParaRPr lang="en-US"/>
           </a:p>
           <a:p>
             <a:pPr lvl="2"/>
@@ -1610,6 +1663,7 @@
               <a:rPr lang="en-US"/>
               <a:t>Third level</a:t>
             </a:r>
+            <a:endParaRPr lang="en-US"/>
           </a:p>
           <a:p>
             <a:pPr lvl="3"/>
@@ -1617,6 +1671,7 @@
               <a:rPr lang="en-US"/>
               <a:t>Fourth level</a:t>
             </a:r>
+            <a:endParaRPr lang="en-US"/>
           </a:p>
           <a:p>
             <a:pPr lvl="4"/>
@@ -1624,6 +1679,7 @@
               <a:rPr lang="en-US"/>
               <a:t>Fifth level</a:t>
             </a:r>
+            <a:endParaRPr lang="en-US"/>
           </a:p>
         </p:txBody>
       </p:sp>
@@ -1644,7 +1700,6 @@
           <a:p>
             <a:fld id="{63A1C593-65D0-4073-BCC9-577B9352EA97}" type="datetimeFigureOut">
               <a:rPr lang="en-US" smtClean="0"/>
-              <a:t>4/22/26</a:t>
             </a:fld>
             <a:endParaRPr lang="en-US"/>
           </a:p>
@@ -1669,6 +1724,7 @@
               <a:rPr lang="en-US"/>
               <a:t>[Copyright Info]</a:t>
             </a:r>
+            <a:endParaRPr lang="en-US"/>
           </a:p>
         </p:txBody>
       </p:sp>
@@ -1689,7 +1745,6 @@
           <a:p>
             <a:fld id="{9B618960-8005-486C-9A75-10CB2AAC16F9}" type="slidenum">
               <a:rPr lang="en-US" smtClean="0"/>
-              <a:t>‹#›</a:t>
             </a:fld>
             <a:endParaRPr lang="en-US"/>
           </a:p>
@@ -1745,6 +1800,7 @@
               <a:rPr lang="en-US"/>
               <a:t>Click to edit Master title style</a:t>
             </a:r>
+            <a:endParaRPr lang="en-US"/>
           </a:p>
         </p:txBody>
       </p:sp>
@@ -1810,6 +1866,7 @@
               <a:rPr lang="en-US"/>
               <a:t>Click to edit Master text styles</a:t>
             </a:r>
+            <a:endParaRPr lang="en-US"/>
           </a:p>
         </p:txBody>
       </p:sp>
@@ -1838,6 +1895,7 @@
               <a:rPr lang="en-US"/>
               <a:t>Click to edit Master text styles</a:t>
             </a:r>
+            <a:endParaRPr lang="en-US"/>
           </a:p>
           <a:p>
             <a:pPr lvl="1"/>
@@ -1845,6 +1903,7 @@
               <a:rPr lang="en-US"/>
               <a:t>Second level</a:t>
             </a:r>
+            <a:endParaRPr lang="en-US"/>
           </a:p>
           <a:p>
             <a:pPr lvl="2"/>
@@ -1852,6 +1911,7 @@
               <a:rPr lang="en-US"/>
               <a:t>Third level</a:t>
             </a:r>
+            <a:endParaRPr lang="en-US"/>
           </a:p>
           <a:p>
             <a:pPr lvl="3"/>
@@ -1859,6 +1919,7 @@
               <a:rPr lang="en-US"/>
               <a:t>Fourth level</a:t>
             </a:r>
+            <a:endParaRPr lang="en-US"/>
           </a:p>
           <a:p>
             <a:pPr lvl="4"/>
@@ -1866,6 +1927,7 @@
               <a:rPr lang="en-US"/>
               <a:t>Fifth level</a:t>
             </a:r>
+            <a:endParaRPr lang="en-US"/>
           </a:p>
         </p:txBody>
       </p:sp>
@@ -1931,6 +1993,7 @@
               <a:rPr lang="en-US"/>
               <a:t>Click to edit Master text styles</a:t>
             </a:r>
+            <a:endParaRPr lang="en-US"/>
           </a:p>
         </p:txBody>
       </p:sp>
@@ -1959,6 +2022,7 @@
               <a:rPr lang="en-US"/>
               <a:t>Click to edit Master text styles</a:t>
             </a:r>
+            <a:endParaRPr lang="en-US"/>
           </a:p>
           <a:p>
             <a:pPr lvl="1"/>
@@ -1966,6 +2030,7 @@
               <a:rPr lang="en-US"/>
               <a:t>Second level</a:t>
             </a:r>
+            <a:endParaRPr lang="en-US"/>
           </a:p>
           <a:p>
             <a:pPr lvl="2"/>
@@ -1973,6 +2038,7 @@
               <a:rPr lang="en-US"/>
               <a:t>Third level</a:t>
             </a:r>
+            <a:endParaRPr lang="en-US"/>
           </a:p>
           <a:p>
             <a:pPr lvl="3"/>
@@ -1980,6 +2046,7 @@
               <a:rPr lang="en-US"/>
               <a:t>Fourth level</a:t>
             </a:r>
+            <a:endParaRPr lang="en-US"/>
           </a:p>
           <a:p>
             <a:pPr lvl="4"/>
@@ -1987,6 +2054,7 @@
               <a:rPr lang="en-US"/>
               <a:t>Fifth level</a:t>
             </a:r>
+            <a:endParaRPr lang="en-US"/>
           </a:p>
         </p:txBody>
       </p:sp>
@@ -2007,7 +2075,6 @@
           <a:p>
             <a:fld id="{63A1C593-65D0-4073-BCC9-577B9352EA97}" type="datetimeFigureOut">
               <a:rPr lang="en-US" smtClean="0"/>
-              <a:t>4/22/26</a:t>
             </a:fld>
             <a:endParaRPr lang="en-US"/>
           </a:p>
@@ -2032,6 +2099,7 @@
               <a:rPr lang="en-US"/>
               <a:t>[Copyright Info]</a:t>
             </a:r>
+            <a:endParaRPr lang="en-US"/>
           </a:p>
         </p:txBody>
       </p:sp>
@@ -2052,7 +2120,6 @@
           <a:p>
             <a:fld id="{9B618960-8005-486C-9A75-10CB2AAC16F9}" type="slidenum">
               <a:rPr lang="en-US" smtClean="0"/>
-              <a:t>‹#›</a:t>
             </a:fld>
             <a:endParaRPr lang="en-US"/>
           </a:p>
@@ -2103,6 +2170,7 @@
               <a:rPr lang="en-US"/>
               <a:t>Click to edit Master title style</a:t>
             </a:r>
+            <a:endParaRPr lang="en-US"/>
           </a:p>
         </p:txBody>
       </p:sp>
@@ -2123,7 +2191,6 @@
           <a:p>
             <a:fld id="{63A1C593-65D0-4073-BCC9-577B9352EA97}" type="datetimeFigureOut">
               <a:rPr lang="en-US" smtClean="0"/>
-              <a:t>4/22/26</a:t>
             </a:fld>
             <a:endParaRPr lang="en-US"/>
           </a:p>
@@ -2148,6 +2215,7 @@
               <a:rPr lang="en-US"/>
               <a:t>[Copyright Info]</a:t>
             </a:r>
+            <a:endParaRPr lang="en-US"/>
           </a:p>
         </p:txBody>
       </p:sp>
@@ -2168,7 +2236,6 @@
           <a:p>
             <a:fld id="{9B618960-8005-486C-9A75-10CB2AAC16F9}" type="slidenum">
               <a:rPr lang="en-US" smtClean="0"/>
-              <a:t>‹#›</a:t>
             </a:fld>
             <a:endParaRPr lang="en-US"/>
           </a:p>
@@ -2217,7 +2284,6 @@
           <a:p>
             <a:fld id="{63A1C593-65D0-4073-BCC9-577B9352EA97}" type="datetimeFigureOut">
               <a:rPr lang="en-US" smtClean="0"/>
-              <a:t>4/22/26</a:t>
             </a:fld>
             <a:endParaRPr lang="en-US"/>
           </a:p>
@@ -2242,6 +2308,7 @@
               <a:rPr lang="en-US"/>
               <a:t>[Copyright Info]</a:t>
             </a:r>
+            <a:endParaRPr lang="en-US"/>
           </a:p>
         </p:txBody>
       </p:sp>
@@ -2262,7 +2329,6 @@
           <a:p>
             <a:fld id="{9B618960-8005-486C-9A75-10CB2AAC16F9}" type="slidenum">
               <a:rPr lang="en-US" smtClean="0"/>
-              <a:t>‹#›</a:t>
             </a:fld>
             <a:endParaRPr lang="en-US"/>
           </a:p>
@@ -2322,6 +2388,7 @@
               <a:rPr lang="en-US"/>
               <a:t>Click to edit Master title style</a:t>
             </a:r>
+            <a:endParaRPr lang="en-US"/>
           </a:p>
         </p:txBody>
       </p:sp>
@@ -2378,6 +2445,7 @@
               <a:rPr lang="en-US"/>
               <a:t>Click to edit Master text styles</a:t>
             </a:r>
+            <a:endParaRPr lang="en-US"/>
           </a:p>
           <a:p>
             <a:pPr lvl="1"/>
@@ -2385,6 +2453,7 @@
               <a:rPr lang="en-US"/>
               <a:t>Second level</a:t>
             </a:r>
+            <a:endParaRPr lang="en-US"/>
           </a:p>
           <a:p>
             <a:pPr lvl="2"/>
@@ -2392,6 +2461,7 @@
               <a:rPr lang="en-US"/>
               <a:t>Third level</a:t>
             </a:r>
+            <a:endParaRPr lang="en-US"/>
           </a:p>
           <a:p>
             <a:pPr lvl="3"/>
@@ -2399,6 +2469,7 @@
               <a:rPr lang="en-US"/>
               <a:t>Fourth level</a:t>
             </a:r>
+            <a:endParaRPr lang="en-US"/>
           </a:p>
           <a:p>
             <a:pPr lvl="4"/>
@@ -2406,6 +2477,7 @@
               <a:rPr lang="en-US"/>
               <a:t>Fifth level</a:t>
             </a:r>
+            <a:endParaRPr lang="en-US"/>
           </a:p>
         </p:txBody>
       </p:sp>
@@ -2471,6 +2543,7 @@
               <a:rPr lang="en-US"/>
               <a:t>Click to edit Master text styles</a:t>
             </a:r>
+            <a:endParaRPr lang="en-US"/>
           </a:p>
         </p:txBody>
       </p:sp>
@@ -2491,7 +2564,6 @@
           <a:p>
             <a:fld id="{63A1C593-65D0-4073-BCC9-577B9352EA97}" type="datetimeFigureOut">
               <a:rPr lang="en-US" smtClean="0"/>
-              <a:t>4/22/26</a:t>
             </a:fld>
             <a:endParaRPr lang="en-US"/>
           </a:p>
@@ -2516,6 +2588,7 @@
               <a:rPr lang="en-US"/>
               <a:t>[Copyright Info]</a:t>
             </a:r>
+            <a:endParaRPr lang="en-US"/>
           </a:p>
         </p:txBody>
       </p:sp>
@@ -2536,7 +2609,6 @@
           <a:p>
             <a:fld id="{9B618960-8005-486C-9A75-10CB2AAC16F9}" type="slidenum">
               <a:rPr lang="en-US" smtClean="0"/>
-              <a:t>‹#›</a:t>
             </a:fld>
             <a:endParaRPr lang="en-US"/>
           </a:p>
@@ -2596,6 +2668,7 @@
               <a:rPr lang="en-US"/>
               <a:t>Click to edit Master title style</a:t>
             </a:r>
+            <a:endParaRPr lang="en-US"/>
           </a:p>
         </p:txBody>
       </p:sp>
@@ -2722,6 +2795,7 @@
               <a:rPr lang="en-US"/>
               <a:t>Click to edit Master text styles</a:t>
             </a:r>
+            <a:endParaRPr lang="en-US"/>
           </a:p>
         </p:txBody>
       </p:sp>
@@ -2742,7 +2816,6 @@
           <a:p>
             <a:fld id="{63A1C593-65D0-4073-BCC9-577B9352EA97}" type="datetimeFigureOut">
               <a:rPr lang="en-US" smtClean="0"/>
-              <a:t>4/22/26</a:t>
             </a:fld>
             <a:endParaRPr lang="en-US"/>
           </a:p>
@@ -2767,6 +2840,7 @@
               <a:rPr lang="en-US"/>
               <a:t>[Copyright Info]</a:t>
             </a:r>
+            <a:endParaRPr lang="en-US"/>
           </a:p>
         </p:txBody>
       </p:sp>
@@ -2787,7 +2861,6 @@
           <a:p>
             <a:fld id="{9B618960-8005-486C-9A75-10CB2AAC16F9}" type="slidenum">
               <a:rPr lang="en-US" smtClean="0"/>
-              <a:t>‹#›</a:t>
             </a:fld>
             <a:endParaRPr lang="en-US"/>
           </a:p>
@@ -2853,6 +2926,7 @@
               <a:rPr lang="en-US"/>
               <a:t>Click to edit Master title style</a:t>
             </a:r>
+            <a:endParaRPr lang="en-US"/>
           </a:p>
         </p:txBody>
       </p:sp>
@@ -2886,6 +2960,7 @@
               <a:rPr lang="en-US"/>
               <a:t>Click to edit Master text styles</a:t>
             </a:r>
+            <a:endParaRPr lang="en-US"/>
           </a:p>
           <a:p>
             <a:pPr lvl="1"/>
@@ -2893,6 +2968,7 @@
               <a:rPr lang="en-US"/>
               <a:t>Second level</a:t>
             </a:r>
+            <a:endParaRPr lang="en-US"/>
           </a:p>
           <a:p>
             <a:pPr lvl="2"/>
@@ -2900,6 +2976,7 @@
               <a:rPr lang="en-US"/>
               <a:t>Third level</a:t>
             </a:r>
+            <a:endParaRPr lang="en-US"/>
           </a:p>
           <a:p>
             <a:pPr lvl="3"/>
@@ -2907,6 +2984,7 @@
               <a:rPr lang="en-US"/>
               <a:t>Fourth level</a:t>
             </a:r>
+            <a:endParaRPr lang="en-US"/>
           </a:p>
           <a:p>
             <a:pPr lvl="4"/>
@@ -2914,6 +2992,7 @@
               <a:rPr lang="en-US"/>
               <a:t>Fifth level</a:t>
             </a:r>
+            <a:endParaRPr lang="en-US"/>
           </a:p>
         </p:txBody>
       </p:sp>
@@ -2952,7 +3031,6 @@
           <a:p>
             <a:fld id="{63A1C593-65D0-4073-BCC9-577B9352EA97}" type="datetimeFigureOut">
               <a:rPr lang="en-US" smtClean="0"/>
-              <a:t>4/22/26</a:t>
             </a:fld>
             <a:endParaRPr lang="en-US"/>
           </a:p>
@@ -2995,6 +3073,7 @@
               <a:rPr lang="en-US"/>
               <a:t>[Copyright Info]</a:t>
             </a:r>
+            <a:endParaRPr lang="en-US"/>
           </a:p>
         </p:txBody>
       </p:sp>
@@ -3033,7 +3112,6 @@
           <a:p>
             <a:fld id="{9B618960-8005-486C-9A75-10CB2AAC16F9}" type="slidenum">
               <a:rPr lang="en-US" smtClean="0"/>
-              <a:t>‹#›</a:t>
             </a:fld>
             <a:endParaRPr lang="en-US"/>
           </a:p>
@@ -3047,12 +3125,12 @@
           </p:cNvPicPr>
           <p:nvPr userDrawn="1">
             <p:custDataLst>
-              <p:tags r:id="rId13"/>
+              <p:tags r:id="rId12"/>
             </p:custDataLst>
           </p:nvPr>
         </p:nvPicPr>
         <p:blipFill>
-          <a:blip r:embed="rId15">
+          <a:blip r:embed="rId13">
             <a:extLst>
               <a:ext uri="{28A0092B-C50C-407E-A947-70E740481C1C}">
                 <a14:useLocalDpi xmlns:a14="http://schemas.microsoft.com/office/drawing/2010/main" val="0"/>
@@ -3151,7 +3229,7 @@
           </p:nvPr>
         </p:nvPicPr>
         <p:blipFill>
-          <a:blip r:embed="rId15">
+          <a:blip r:embed="rId13">
             <a:extLst>
               <a:ext uri="{28A0092B-C50C-407E-A947-70E740481C1C}">
                 <a14:useLocalDpi xmlns:a14="http://schemas.microsoft.com/office/drawing/2010/main" val="0"/>
@@ -3275,7 +3353,7 @@
       </a:lvl1pPr>
     </p:titleStyle>
     <p:bodyStyle>
-      <a:lvl1pPr marL="228600" indent="-228600" algn="l" defTabSz="914400" rtl="0" eaLnBrk="1" latinLnBrk="0" hangingPunct="1">
+      <a:lvl1pPr marL="0" indent="0" algn="l" defTabSz="914400" rtl="0" eaLnBrk="1" latinLnBrk="0" hangingPunct="1">
         <a:lnSpc>
           <a:spcPct val="90000"/>
         </a:lnSpc>
@@ -3283,7 +3361,7 @@
           <a:spcPts val="1000"/>
         </a:spcBef>
         <a:buFont typeface="Arial" panose="020B0704020202020204" pitchFamily="34" charset="0"/>
-        <a:buChar char="•"/>
+        <a:buNone/>
         <a:defRPr sz="2800" kern="1200">
           <a:solidFill>
             <a:schemeClr val="tx1"/>
@@ -3293,7 +3371,7 @@
           <a:cs typeface="+mn-cs"/>
         </a:defRPr>
       </a:lvl1pPr>
-      <a:lvl2pPr marL="685800" indent="-228600" algn="l" defTabSz="914400" rtl="0" eaLnBrk="1" latinLnBrk="0" hangingPunct="1">
+      <a:lvl2pPr marL="457200" indent="0" algn="l" defTabSz="914400" rtl="0" eaLnBrk="1" latinLnBrk="0" hangingPunct="1">
         <a:lnSpc>
           <a:spcPct val="90000"/>
         </a:lnSpc>
@@ -3301,7 +3379,7 @@
           <a:spcPts val="500"/>
         </a:spcBef>
         <a:buFont typeface="Arial" panose="020B0704020202020204" pitchFamily="34" charset="0"/>
-        <a:buChar char="•"/>
+        <a:buNone/>
         <a:defRPr sz="2400" kern="1200">
           <a:solidFill>
             <a:schemeClr val="tx1"/>
@@ -3311,7 +3389,7 @@
           <a:cs typeface="+mn-cs"/>
         </a:defRPr>
       </a:lvl2pPr>
-      <a:lvl3pPr marL="1143000" indent="-228600" algn="l" defTabSz="914400" rtl="0" eaLnBrk="1" latinLnBrk="0" hangingPunct="1">
+      <a:lvl3pPr marL="914400" indent="0" algn="l" defTabSz="914400" rtl="0" eaLnBrk="1" latinLnBrk="0" hangingPunct="1">
         <a:lnSpc>
           <a:spcPct val="90000"/>
         </a:lnSpc>
@@ -3319,7 +3397,7 @@
           <a:spcPts val="500"/>
         </a:spcBef>
         <a:buFont typeface="Arial" panose="020B0704020202020204" pitchFamily="34" charset="0"/>
-        <a:buChar char="•"/>
+        <a:buNone/>
         <a:defRPr sz="2000" kern="1200">
           <a:solidFill>
             <a:schemeClr val="tx1"/>
@@ -3329,7 +3407,7 @@
           <a:cs typeface="+mn-cs"/>
         </a:defRPr>
       </a:lvl3pPr>
-      <a:lvl4pPr marL="1600200" indent="-228600" algn="l" defTabSz="914400" rtl="0" eaLnBrk="1" latinLnBrk="0" hangingPunct="1">
+      <a:lvl4pPr marL="1371600" indent="0" algn="l" defTabSz="914400" rtl="0" eaLnBrk="1" latinLnBrk="0" hangingPunct="1">
         <a:lnSpc>
           <a:spcPct val="90000"/>
         </a:lnSpc>
@@ -3337,7 +3415,7 @@
           <a:spcPts val="500"/>
         </a:spcBef>
         <a:buFont typeface="Arial" panose="020B0704020202020204" pitchFamily="34" charset="0"/>
-        <a:buChar char="•"/>
+        <a:buNone/>
         <a:defRPr sz="1800" kern="1200">
           <a:solidFill>
             <a:schemeClr val="tx1"/>
@@ -3347,7 +3425,7 @@
           <a:cs typeface="+mn-cs"/>
         </a:defRPr>
       </a:lvl4pPr>
-      <a:lvl5pPr marL="2057400" indent="-228600" algn="l" defTabSz="914400" rtl="0" eaLnBrk="1" latinLnBrk="0" hangingPunct="1">
+      <a:lvl5pPr marL="1828800" indent="0" algn="l" defTabSz="914400" rtl="0" eaLnBrk="1" latinLnBrk="0" hangingPunct="1">
         <a:lnSpc>
           <a:spcPct val="90000"/>
         </a:lnSpc>
@@ -3355,7 +3433,7 @@
           <a:spcPts val="500"/>
         </a:spcBef>
         <a:buFont typeface="Arial" panose="020B0704020202020204" pitchFamily="34" charset="0"/>
-        <a:buChar char="•"/>
+        <a:buNone/>
         <a:defRPr sz="1800" kern="1200">
           <a:solidFill>
             <a:schemeClr val="tx1"/>
@@ -3566,7 +3644,7 @@
         </p:nvSpPr>
         <p:spPr>
           <a:xfrm>
-            <a:off x="838200" y="424760"/>
+            <a:off x="838200" y="284425"/>
             <a:ext cx="10515600" cy="5491163"/>
           </a:xfrm>
         </p:spPr>
@@ -3585,6 +3663,11 @@
               </a:rPr>
               <a:t>[LYRICS AND CHORDS]</a:t>
             </a:r>
+            <a:endParaRPr lang="en-US" dirty="0">
+              <a:latin typeface="Times New Roman Regular" panose="02020603050405020304" charset="0"/>
+              <a:cs typeface="Times New Roman Regular" panose="02020603050405020304" charset="0"/>
+              <a:sym typeface="+mn-ea"/>
+            </a:endParaRPr>
           </a:p>
         </p:txBody>
       </p:sp>
@@ -3615,6 +3698,10 @@
               </a:rPr>
               <a:t>[Title]</a:t>
             </a:r>
+            <a:endParaRPr lang="en-US" sz="2400" dirty="0">
+              <a:latin typeface="Times New Roman Regular" panose="02020603050405020304" charset="0"/>
+              <a:cs typeface="Times New Roman Regular" panose="02020603050405020304" charset="0"/>
+            </a:endParaRPr>
           </a:p>
         </p:txBody>
       </p:sp>
@@ -3646,6 +3733,10 @@
               </a:rPr>
               <a:t>[Copyright Info]</a:t>
             </a:r>
+            <a:endParaRPr lang="en-US" dirty="0">
+              <a:latin typeface="Times New Roman Regular" panose="02020603050405020304" charset="0"/>
+              <a:cs typeface="Times New Roman Regular" panose="02020603050405020304" charset="0"/>
+            </a:endParaRPr>
           </a:p>
         </p:txBody>
       </p:sp>
@@ -3661,7 +3752,7 @@
 </file>
 
 <file path=ppt/tags/tag1.xml><?xml version="1.0" encoding="utf-8"?>
-<p:tagLst xmlns:a="http://schemas.openxmlformats.org/drawingml/2006/main" xmlns:r="http://schemas.openxmlformats.org/officeDocument/2006/relationships" xmlns:p="http://schemas.openxmlformats.org/presentationml/2006/main">
+<p:tagLst xmlns:p="http://schemas.openxmlformats.org/presentationml/2006/main">
   <p:tag name="KSO_WM_UNIT_HIGHLIGHT" val="0"/>
   <p:tag name="KSO_WM_UNIT_COMPATIBLE" val="0"/>
   <p:tag name="KSO_WM_UNIT_DIAGRAM_ISNUMVISUAL" val="0"/>
@@ -3676,7 +3767,7 @@
 </file>
 
 <file path=ppt/tags/tag2.xml><?xml version="1.0" encoding="utf-8"?>
-<p:tagLst xmlns:a="http://schemas.openxmlformats.org/drawingml/2006/main" xmlns:r="http://schemas.openxmlformats.org/officeDocument/2006/relationships" xmlns:p="http://schemas.openxmlformats.org/presentationml/2006/main">
+<p:tagLst xmlns:p="http://schemas.openxmlformats.org/presentationml/2006/main">
   <p:tag name="KSO_WM_UNIT_HIGHLIGHT" val="0"/>
   <p:tag name="KSO_WM_UNIT_COMPATIBLE" val="0"/>
   <p:tag name="KSO_WM_UNIT_DIAGRAM_ISNUMVISUAL" val="0"/>
@@ -3691,7 +3782,7 @@
 </file>
 
 <file path=ppt/tags/tag3.xml><?xml version="1.0" encoding="utf-8"?>
-<p:tagLst xmlns:a="http://schemas.openxmlformats.org/drawingml/2006/main" xmlns:r="http://schemas.openxmlformats.org/officeDocument/2006/relationships" xmlns:p="http://schemas.openxmlformats.org/presentationml/2006/main">
+<p:tagLst xmlns:p="http://schemas.openxmlformats.org/presentationml/2006/main">
   <p:tag name="KSO_WM_SLIDE_TYPE" val="text"/>
   <p:tag name="KSO_WM_BEAUTIFY_FLAG" val="#wm#"/>
   <p:tag name="KSO_WM_SLIDE_THEME_ID" val="3312678"/>
@@ -3950,8 +4041,6 @@
       </a:bgFillStyleLst>
     </a:fmtScheme>
   </a:themeElements>
-  <a:objectDefaults/>
-  <a:extraClrSchemeLst/>
   <a:extLst>
     <a:ext uri="{05A4C25C-085E-4340-85A3-A5531E510DB2}">
       <thm15:themeFamily xmlns:thm15="http://schemas.microsoft.com/office/thememl/2012/main" name="Office Theme" id="{62F939B6-93AF-4DB8-9C6B-D6C7DFDC589F}" vid="{4A3C46E8-61CC-4603-A589-7422A47A8E4A}"/>
@@ -4211,8 +4300,6 @@
       </a:bgFillStyleLst>
     </a:fmtScheme>
   </a:themeElements>
-  <a:objectDefaults/>
-  <a:extraClrSchemeLst/>
   <a:extLst>
     <a:ext uri="{05A4C25C-085E-4340-85A3-A5531E510DB2}">
       <thm15:themeFamily xmlns:thm15="http://schemas.microsoft.com/office/thememl/2012/main" name="Office Theme" id="{62F939B6-93AF-4DB8-9C6B-D6C7DFDC589F}" vid="{4A3C46E8-61CC-4603-A589-7422A47A8E4A}"/>
